--- a/docs/מצגת.pptx
+++ b/docs/מצגת.pptx
@@ -226,7 +226,7 @@
           <a:p>
             <a:fld id="{FD913024-4032-4B4F-8680-09D5E08EDB6E}" type="datetimeFigureOut">
               <a:rPr lang="en-US" smtClean="0"/>
-              <a:t>1/1/2026</a:t>
+              <a:t>1/3/2026</a:t>
             </a:fld>
             <a:endParaRPr lang="en-US" dirty="0"/>
           </a:p>
@@ -403,7 +403,7 @@
           <a:p>
             <a:fld id="{F2AE225E-43E0-7047-8ADB-DD9EBB41B4D0}" type="datetimeFigureOut">
               <a:rPr lang="en-US" noProof="0" smtClean="0"/>
-              <a:t>1/1/2026</a:t>
+              <a:t>1/3/2026</a:t>
             </a:fld>
             <a:endParaRPr lang="en-US" noProof="0" dirty="0"/>
           </a:p>
@@ -27633,7 +27633,7 @@
             <p:ph sz="quarter" idx="13"/>
             <p:extLst>
               <p:ext uri="{D42A27DB-BD31-4B8C-83A1-F6EECF244321}">
-                <p14:modId xmlns:p14="http://schemas.microsoft.com/office/powerpoint/2010/main" val="2931586517"/>
+                <p14:modId xmlns:p14="http://schemas.microsoft.com/office/powerpoint/2010/main" val="3710230206"/>
               </p:ext>
             </p:extLst>
           </p:nvPr>
@@ -27700,8 +27700,12 @@
                     <a:p>
                       <a:pPr algn="l" rtl="0"/>
                       <a:r>
+                        <a:rPr lang="en-US" sz="2000" b="0"/>
+                        <a:t>ATTEMPTS </a:t>
+                      </a:r>
+                      <a:r>
                         <a:rPr lang="en-US" sz="2000" b="0" dirty="0"/>
-                        <a:t>ATTEMTPS / SEC</a:t>
+                        <a:t>/ SEC</a:t>
                       </a:r>
                     </a:p>
                   </a:txBody>
@@ -27714,9 +27718,21 @@
                     <a:p>
                       <a:pPr algn="l" rtl="0"/>
                       <a:r>
-                        <a:rPr lang="en-US" sz="2000" b="0" dirty="0"/>
-                        <a:t>TTFS</a:t>
+                        <a:rPr lang="en-US" sz="2000" b="0"/>
+                        <a:t>TTFS </a:t>
                       </a:r>
+                      <a:br>
+                        <a:rPr lang="en-US" sz="2000" b="0"/>
+                      </a:br>
+                      <a:r>
+                        <a:rPr lang="en-US" sz="900" b="0"/>
+                        <a:t>Time </a:t>
+                      </a:r>
+                      <a:r>
+                        <a:rPr lang="en-US" sz="900" b="0" dirty="0"/>
+                        <a:t>To First Success</a:t>
+                      </a:r>
+                      <a:endParaRPr lang="en-US" sz="2000" b="0" dirty="0"/>
                     </a:p>
                   </a:txBody>
                   <a:tcPr anchor="ctr"/>
@@ -29389,13 +29405,13 @@
         </p:spPr>
         <p:txBody>
           <a:bodyPr>
-            <a:normAutofit lnSpcReduction="10000"/>
+            <a:normAutofit fontScale="92500" lnSpcReduction="10000"/>
           </a:bodyPr>
           <a:lstStyle/>
           <a:p>
             <a:pPr algn="r" rtl="1">
               <a:lnSpc>
-                <a:spcPct val="150000"/>
+                <a:spcPct val="160000"/>
               </a:lnSpc>
               <a:spcBef>
                 <a:spcPts val="600"/>
@@ -29463,7 +29479,7 @@
           <a:p>
             <a:pPr algn="r" rtl="1">
               <a:lnSpc>
-                <a:spcPct val="150000"/>
+                <a:spcPct val="160000"/>
               </a:lnSpc>
               <a:spcBef>
                 <a:spcPts val="600"/>
@@ -29510,7 +29526,7 @@
           <a:p>
             <a:pPr algn="r" rtl="1">
               <a:lnSpc>
-                <a:spcPct val="150000"/>
+                <a:spcPct val="160000"/>
               </a:lnSpc>
               <a:spcBef>
                 <a:spcPts val="600"/>
@@ -29574,7 +29590,7 @@
           <a:p>
             <a:pPr algn="r" rtl="1">
               <a:lnSpc>
-                <a:spcPct val="150000"/>
+                <a:spcPct val="160000"/>
               </a:lnSpc>
               <a:spcBef>
                 <a:spcPts val="600"/>
@@ -30352,8 +30368,8 @@
           </a:p>
         </p:txBody>
       </p:sp>
-      <mc:AlternateContent xmlns:mc="http://schemas.openxmlformats.org/markup-compatibility/2006">
-        <mc:Choice xmlns:a14="http://schemas.microsoft.com/office/drawing/2010/main" Requires="a14">
+      <mc:AlternateContent xmlns:mc="http://schemas.openxmlformats.org/markup-compatibility/2006" xmlns:a14="http://schemas.microsoft.com/office/drawing/2010/main">
+        <mc:Choice Requires="a14">
           <p:sp>
             <p:nvSpPr>
               <p:cNvPr id="25" name="Content Placeholder 24">
@@ -30608,7 +30624,7 @@
             </p:txBody>
           </p:sp>
         </mc:Choice>
-        <mc:Fallback>
+        <mc:Fallback xmlns="">
           <p:sp>
             <p:nvSpPr>
               <p:cNvPr id="25" name="Content Placeholder 24">
@@ -30972,7 +30988,7 @@
             <p:ph sz="quarter" idx="13"/>
             <p:extLst>
               <p:ext uri="{D42A27DB-BD31-4B8C-83A1-F6EECF244321}">
-                <p14:modId xmlns:p14="http://schemas.microsoft.com/office/powerpoint/2010/main" val="1415733711"/>
+                <p14:modId xmlns:p14="http://schemas.microsoft.com/office/powerpoint/2010/main" val="2052163539"/>
               </p:ext>
             </p:extLst>
           </p:nvPr>
@@ -31040,7 +31056,7 @@
                       <a:pPr algn="l" rtl="0"/>
                       <a:r>
                         <a:rPr lang="en-US" sz="2000" b="0" dirty="0"/>
-                        <a:t>ATTEMTPS / SEC</a:t>
+                        <a:t>ATTEMPTS / SEC</a:t>
                       </a:r>
                     </a:p>
                   </a:txBody>
@@ -31583,7 +31599,7 @@
             <p:ph sz="quarter" idx="13"/>
             <p:extLst>
               <p:ext uri="{D42A27DB-BD31-4B8C-83A1-F6EECF244321}">
-                <p14:modId xmlns:p14="http://schemas.microsoft.com/office/powerpoint/2010/main" val="3049279267"/>
+                <p14:modId xmlns:p14="http://schemas.microsoft.com/office/powerpoint/2010/main" val="1197483526"/>
               </p:ext>
             </p:extLst>
           </p:nvPr>
@@ -31651,7 +31667,7 @@
                       <a:pPr algn="l" rtl="0"/>
                       <a:r>
                         <a:rPr lang="en-US" sz="2000" b="0" dirty="0"/>
-                        <a:t>ATTEMTPS / SEC</a:t>
+                        <a:t>ATTEMPTS / SEC</a:t>
                       </a:r>
                     </a:p>
                   </a:txBody>

--- a/docs/מצגת.pptx
+++ b/docs/מצגת.pptx
@@ -5,10 +5,10 @@
     <p:sldMasterId id="2147483648" r:id="rId4"/>
   </p:sldMasterIdLst>
   <p:notesMasterIdLst>
-    <p:notesMasterId r:id="rId17"/>
+    <p:notesMasterId r:id="rId18"/>
   </p:notesMasterIdLst>
   <p:handoutMasterIdLst>
-    <p:handoutMasterId r:id="rId18"/>
+    <p:handoutMasterId r:id="rId19"/>
   </p:handoutMasterIdLst>
   <p:sldIdLst>
     <p:sldId id="317" r:id="rId5"/>
@@ -22,7 +22,8 @@
     <p:sldId id="319" r:id="rId13"/>
     <p:sldId id="320" r:id="rId14"/>
     <p:sldId id="314" r:id="rId15"/>
-    <p:sldId id="304" r:id="rId16"/>
+    <p:sldId id="321" r:id="rId16"/>
+    <p:sldId id="304" r:id="rId17"/>
   </p:sldIdLst>
   <p:sldSz cx="12192000" cy="6858000"/>
   <p:notesSz cx="6858000" cy="9144000"/>
@@ -226,7 +227,7 @@
           <a:p>
             <a:fld id="{FD913024-4032-4B4F-8680-09D5E08EDB6E}" type="datetimeFigureOut">
               <a:rPr lang="en-US" smtClean="0"/>
-              <a:t>1/3/2026</a:t>
+              <a:t>1/6/2026</a:t>
             </a:fld>
             <a:endParaRPr lang="en-US" dirty="0"/>
           </a:p>
@@ -403,7 +404,7 @@
           <a:p>
             <a:fld id="{F2AE225E-43E0-7047-8ADB-DD9EBB41B4D0}" type="datetimeFigureOut">
               <a:rPr lang="en-US" noProof="0" smtClean="0"/>
-              <a:t>1/3/2026</a:t>
+              <a:t>1/6/2026</a:t>
             </a:fld>
             <a:endParaRPr lang="en-US" noProof="0" dirty="0"/>
           </a:p>
@@ -776,6 +777,97 @@
     <p:extLst>
       <p:ext uri="{BB962C8B-B14F-4D97-AF65-F5344CB8AC3E}">
         <p14:creationId xmlns:p14="http://schemas.microsoft.com/office/powerpoint/2010/main" val="75031625"/>
+      </p:ext>
+    </p:extLst>
+  </p:cSld>
+  <p:clrMapOvr>
+    <a:masterClrMapping/>
+  </p:clrMapOvr>
+</p:notes>
+</file>
+
+<file path=ppt/notesSlides/notesSlide10.xml><?xml version="1.0" encoding="utf-8"?>
+<p:notes xmlns:a="http://schemas.openxmlformats.org/drawingml/2006/main" xmlns:r="http://schemas.openxmlformats.org/officeDocument/2006/relationships" xmlns:p="http://schemas.openxmlformats.org/presentationml/2006/main">
+  <p:cSld>
+    <p:spTree>
+      <p:nvGrpSpPr>
+        <p:cNvPr id="1" name=""/>
+        <p:cNvGrpSpPr/>
+        <p:nvPr/>
+      </p:nvGrpSpPr>
+      <p:grpSpPr>
+        <a:xfrm>
+          <a:off x="0" y="0"/>
+          <a:ext cx="0" cy="0"/>
+          <a:chOff x="0" y="0"/>
+          <a:chExt cx="0" cy="0"/>
+        </a:xfrm>
+      </p:grpSpPr>
+      <p:sp>
+        <p:nvSpPr>
+          <p:cNvPr id="2" name="Slide Image Placeholder 1"/>
+          <p:cNvSpPr>
+            <a:spLocks noGrp="1" noRot="1" noChangeAspect="1"/>
+          </p:cNvSpPr>
+          <p:nvPr>
+            <p:ph type="sldImg"/>
+          </p:nvPr>
+        </p:nvSpPr>
+        <p:spPr/>
+        <p:txBody>
+          <a:bodyPr/>
+          <a:lstStyle/>
+          <a:p>
+            <a:endParaRPr lang="en-US"/>
+          </a:p>
+        </p:txBody>
+      </p:sp>
+      <p:sp>
+        <p:nvSpPr>
+          <p:cNvPr id="3" name="Notes Placeholder 2"/>
+          <p:cNvSpPr>
+            <a:spLocks noGrp="1"/>
+          </p:cNvSpPr>
+          <p:nvPr>
+            <p:ph type="body" idx="1"/>
+          </p:nvPr>
+        </p:nvSpPr>
+        <p:spPr/>
+        <p:txBody>
+          <a:bodyPr/>
+          <a:lstStyle/>
+          <a:p>
+            <a:endParaRPr lang="en-US" dirty="0"/>
+          </a:p>
+        </p:txBody>
+      </p:sp>
+      <p:sp>
+        <p:nvSpPr>
+          <p:cNvPr id="4" name="Slide Number Placeholder 3"/>
+          <p:cNvSpPr>
+            <a:spLocks noGrp="1"/>
+          </p:cNvSpPr>
+          <p:nvPr>
+            <p:ph type="sldNum" sz="quarter" idx="5"/>
+          </p:nvPr>
+        </p:nvSpPr>
+        <p:spPr/>
+        <p:txBody>
+          <a:bodyPr/>
+          <a:lstStyle/>
+          <a:p>
+            <a:fld id="{7C366290-4595-5745-A50F-D5EC13BAC604}" type="slidenum">
+              <a:rPr lang="en-US" noProof="0" smtClean="0"/>
+              <a:t>13</a:t>
+            </a:fld>
+            <a:endParaRPr lang="en-US" noProof="0" dirty="0"/>
+          </a:p>
+        </p:txBody>
+      </p:sp>
+    </p:spTree>
+    <p:extLst>
+      <p:ext uri="{BB962C8B-B14F-4D97-AF65-F5344CB8AC3E}">
+        <p14:creationId xmlns:p14="http://schemas.microsoft.com/office/powerpoint/2010/main" val="4105550432"/>
       </p:ext>
     </p:extLst>
   </p:cSld>
@@ -1451,7 +1543,13 @@
   <p:cSld>
     <p:spTree>
       <p:nvGrpSpPr>
-        <p:cNvPr id="1" name=""/>
+        <p:cNvPr id="1" name="">
+          <a:extLst>
+            <a:ext uri="{FF2B5EF4-FFF2-40B4-BE49-F238E27FC236}">
+              <a16:creationId xmlns:a16="http://schemas.microsoft.com/office/drawing/2014/main" id="{0AC8413E-CB6A-3223-144C-FC16D55C3FCF}"/>
+            </a:ext>
+          </a:extLst>
+        </p:cNvPr>
         <p:cNvGrpSpPr/>
         <p:nvPr/>
       </p:nvGrpSpPr>
@@ -1465,7 +1563,13 @@
       </p:grpSpPr>
       <p:sp>
         <p:nvSpPr>
-          <p:cNvPr id="2" name="Slide Image Placeholder 1"/>
+          <p:cNvPr id="2" name="Slide Image Placeholder 1">
+            <a:extLst>
+              <a:ext uri="{FF2B5EF4-FFF2-40B4-BE49-F238E27FC236}">
+                <a16:creationId xmlns:a16="http://schemas.microsoft.com/office/drawing/2014/main" id="{7C8B4BE7-394A-915E-5637-E9F893FBEF11}"/>
+              </a:ext>
+            </a:extLst>
+          </p:cNvPr>
           <p:cNvSpPr>
             <a:spLocks noGrp="1" noRot="1" noChangeAspect="1"/>
           </p:cNvSpPr>
@@ -1484,7 +1588,13 @@
       </p:sp>
       <p:sp>
         <p:nvSpPr>
-          <p:cNvPr id="3" name="Notes Placeholder 2"/>
+          <p:cNvPr id="3" name="Notes Placeholder 2">
+            <a:extLst>
+              <a:ext uri="{FF2B5EF4-FFF2-40B4-BE49-F238E27FC236}">
+                <a16:creationId xmlns:a16="http://schemas.microsoft.com/office/drawing/2014/main" id="{2F32DFEF-8A8D-5E76-024D-BF2D4BD2DE39}"/>
+              </a:ext>
+            </a:extLst>
+          </p:cNvPr>
           <p:cNvSpPr>
             <a:spLocks noGrp="1"/>
           </p:cNvSpPr>
@@ -1503,7 +1613,13 @@
       </p:sp>
       <p:sp>
         <p:nvSpPr>
-          <p:cNvPr id="4" name="Slide Number Placeholder 3"/>
+          <p:cNvPr id="4" name="Slide Number Placeholder 3">
+            <a:extLst>
+              <a:ext uri="{FF2B5EF4-FFF2-40B4-BE49-F238E27FC236}">
+                <a16:creationId xmlns:a16="http://schemas.microsoft.com/office/drawing/2014/main" id="{94A78CA8-B572-94DC-BD3D-475F4944E18F}"/>
+              </a:ext>
+            </a:extLst>
+          </p:cNvPr>
           <p:cNvSpPr>
             <a:spLocks noGrp="1"/>
           </p:cNvSpPr>
@@ -1527,7 +1643,7 @@
     </p:spTree>
     <p:extLst>
       <p:ext uri="{BB962C8B-B14F-4D97-AF65-F5344CB8AC3E}">
-        <p14:creationId xmlns:p14="http://schemas.microsoft.com/office/powerpoint/2010/main" val="4105550432"/>
+        <p14:creationId xmlns:p14="http://schemas.microsoft.com/office/powerpoint/2010/main" val="1459603800"/>
       </p:ext>
     </p:extLst>
   </p:cSld>
@@ -27633,7 +27749,7 @@
             <p:ph sz="quarter" idx="13"/>
             <p:extLst>
               <p:ext uri="{D42A27DB-BD31-4B8C-83A1-F6EECF244321}">
-                <p14:modId xmlns:p14="http://schemas.microsoft.com/office/powerpoint/2010/main" val="3710230206"/>
+                <p14:modId xmlns:p14="http://schemas.microsoft.com/office/powerpoint/2010/main" val="1321865013"/>
               </p:ext>
             </p:extLst>
           </p:nvPr>
@@ -27777,7 +27893,7 @@
                     <a:bodyPr/>
                     <a:lstStyle/>
                     <a:p>
-                      <a:pPr algn="l" rtl="0"/>
+                      <a:pPr algn="ctr" rtl="0"/>
                       <a:r>
                         <a:rPr lang="en-US" sz="2000" b="0" dirty="0"/>
                         <a:t>3.22~</a:t>
@@ -27791,7 +27907,7 @@
                     <a:bodyPr/>
                     <a:lstStyle/>
                     <a:p>
-                      <a:pPr algn="l" rtl="0"/>
+                      <a:pPr algn="ctr" rtl="0"/>
                       <a:r>
                         <a:rPr lang="en-US" sz="2000" b="0" dirty="0"/>
                         <a:t>28.4s~</a:t>
@@ -27805,7 +27921,7 @@
                     <a:bodyPr/>
                     <a:lstStyle/>
                     <a:p>
-                      <a:pPr algn="l" rtl="0"/>
+                      <a:pPr algn="ctr" rtl="0"/>
                       <a:r>
                         <a:rPr lang="en-US" sz="2000" b="0" dirty="0"/>
                         <a:t>2144ms~</a:t>
@@ -27840,7 +27956,7 @@
                     <a:bodyPr/>
                     <a:lstStyle/>
                     <a:p>
-                      <a:pPr algn="l" rtl="0"/>
+                      <a:pPr algn="ctr" rtl="0"/>
                       <a:r>
                         <a:rPr lang="en-US" sz="2000" b="0" dirty="0"/>
                         <a:t>287 Total Attempts</a:t>
@@ -27854,7 +27970,7 @@
                     <a:bodyPr/>
                     <a:lstStyle/>
                     <a:p>
-                      <a:pPr algn="l" rtl="0"/>
+                      <a:pPr algn="ctr" rtl="0"/>
                       <a:r>
                         <a:rPr lang="en-US" sz="2000" b="0" dirty="0"/>
                         <a:t>8.1s~</a:t>
@@ -27868,7 +27984,7 @@
                     <a:bodyPr/>
                     <a:lstStyle/>
                     <a:p>
-                      <a:pPr algn="l" rtl="0"/>
+                      <a:pPr algn="ctr" rtl="0"/>
                       <a:r>
                         <a:rPr lang="en-US" sz="2000" b="0" dirty="0"/>
                         <a:t>933ms~</a:t>
@@ -27963,7 +28079,7 @@
               </a:lnSpc>
             </a:pPr>
             <a:r>
-              <a:rPr lang="he-IL" sz="1300" dirty="0">
+              <a:rPr lang="he-IL" sz="1300" b="1" dirty="0">
                 <a:latin typeface="Levenim MT" panose="02010502060101010101" pitchFamily="2" charset="-79"/>
                 <a:cs typeface="Levenim MT" panose="02010502060101010101" pitchFamily="2" charset="-79"/>
               </a:rPr>
@@ -28389,6 +28505,231 @@
 <file path=ppt/slides/slide12.xml><?xml version="1.0" encoding="utf-8"?>
 <p:sld xmlns:a="http://schemas.openxmlformats.org/drawingml/2006/main" xmlns:r="http://schemas.openxmlformats.org/officeDocument/2006/relationships" xmlns:p="http://schemas.openxmlformats.org/presentationml/2006/main">
   <p:cSld>
+    <p:spTree>
+      <p:nvGrpSpPr>
+        <p:cNvPr id="1" name="">
+          <a:extLst>
+            <a:ext uri="{FF2B5EF4-FFF2-40B4-BE49-F238E27FC236}">
+              <a16:creationId xmlns:a16="http://schemas.microsoft.com/office/drawing/2014/main" id="{13FDE5F2-7823-4EFF-9D1F-F929E2993ED8}"/>
+            </a:ext>
+          </a:extLst>
+        </p:cNvPr>
+        <p:cNvGrpSpPr/>
+        <p:nvPr/>
+      </p:nvGrpSpPr>
+      <p:grpSpPr>
+        <a:xfrm>
+          <a:off x="0" y="0"/>
+          <a:ext cx="0" cy="0"/>
+          <a:chOff x="0" y="0"/>
+          <a:chExt cx="0" cy="0"/>
+        </a:xfrm>
+      </p:grpSpPr>
+      <p:sp>
+        <p:nvSpPr>
+          <p:cNvPr id="9" name="Title 8">
+            <a:extLst>
+              <a:ext uri="{FF2B5EF4-FFF2-40B4-BE49-F238E27FC236}">
+                <a16:creationId xmlns:a16="http://schemas.microsoft.com/office/drawing/2014/main" id="{8FD078B7-FF9E-1160-18C1-61D6BA207A2D}"/>
+              </a:ext>
+            </a:extLst>
+          </p:cNvPr>
+          <p:cNvSpPr>
+            <a:spLocks noGrp="1"/>
+          </p:cNvSpPr>
+          <p:nvPr>
+            <p:ph type="title"/>
+          </p:nvPr>
+        </p:nvSpPr>
+        <p:spPr/>
+        <p:txBody>
+          <a:bodyPr/>
+          <a:lstStyle/>
+          <a:p>
+            <a:pPr algn="r" rtl="1"/>
+            <a:r>
+              <a:rPr lang="he-IL" sz="3200" dirty="0">
+                <a:latin typeface="Levenim MT" panose="02010502060101010101" pitchFamily="2" charset="-79"/>
+                <a:cs typeface="Levenim MT" panose="02010502060101010101" pitchFamily="2" charset="-79"/>
+              </a:rPr>
+              <a:t>מסקנות והמלצות</a:t>
+            </a:r>
+            <a:r>
+              <a:rPr lang="he-IL" dirty="0">
+                <a:latin typeface="Levenim MT" panose="02010502060101010101" pitchFamily="2" charset="-79"/>
+                <a:cs typeface="Levenim MT" panose="02010502060101010101" pitchFamily="2" charset="-79"/>
+              </a:rPr>
+              <a:t> - המשך</a:t>
+            </a:r>
+            <a:endParaRPr lang="en-US" dirty="0">
+              <a:latin typeface="Levenim MT" panose="02010502060101010101" pitchFamily="2" charset="-79"/>
+              <a:cs typeface="Levenim MT" panose="02010502060101010101" pitchFamily="2" charset="-79"/>
+            </a:endParaRPr>
+          </a:p>
+        </p:txBody>
+      </p:sp>
+      <p:sp>
+        <p:nvSpPr>
+          <p:cNvPr id="5" name="Content Placeholder 4">
+            <a:extLst>
+              <a:ext uri="{FF2B5EF4-FFF2-40B4-BE49-F238E27FC236}">
+                <a16:creationId xmlns:a16="http://schemas.microsoft.com/office/drawing/2014/main" id="{25A9E82F-BE11-0FBE-034E-431E11A73344}"/>
+              </a:ext>
+            </a:extLst>
+          </p:cNvPr>
+          <p:cNvSpPr>
+            <a:spLocks noGrp="1"/>
+          </p:cNvSpPr>
+          <p:nvPr>
+            <p:ph sz="quarter" idx="12"/>
+          </p:nvPr>
+        </p:nvSpPr>
+        <p:spPr>
+          <a:xfrm>
+            <a:off x="630315" y="2039111"/>
+            <a:ext cx="10646981" cy="4272912"/>
+          </a:xfrm>
+        </p:spPr>
+        <p:txBody>
+          <a:bodyPr>
+            <a:normAutofit fontScale="92500" lnSpcReduction="10000"/>
+          </a:bodyPr>
+          <a:lstStyle/>
+          <a:p>
+            <a:pPr marL="342900" indent="-342900" algn="r" rtl="1">
+              <a:lnSpc>
+                <a:spcPct val="150000"/>
+              </a:lnSpc>
+              <a:buFont typeface="Courier New" panose="02070309020205020404" pitchFamily="49" charset="0"/>
+              <a:buChar char="o"/>
+            </a:pPr>
+            <a:r>
+              <a:rPr lang="he-IL" dirty="0">
+                <a:latin typeface="Levenim MT" panose="02010502060101010101" pitchFamily="2" charset="-79"/>
+                <a:cs typeface="Levenim MT" panose="02010502060101010101" pitchFamily="2" charset="-79"/>
+              </a:rPr>
+              <a:t>כדי למקסם את יכולת התקיפה, מומלץ לבחור </a:t>
+            </a:r>
+            <a:r>
+              <a:rPr lang="en-US" dirty="0">
+                <a:latin typeface="Levenim MT" panose="02010502060101010101" pitchFamily="2" charset="-79"/>
+                <a:cs typeface="Levenim MT" panose="02010502060101010101" pitchFamily="2" charset="-79"/>
+              </a:rPr>
+              <a:t>Wordlist</a:t>
+            </a:r>
+            <a:r>
+              <a:rPr lang="he-IL" dirty="0">
+                <a:latin typeface="Levenim MT" panose="02010502060101010101" pitchFamily="2" charset="-79"/>
+                <a:cs typeface="Levenim MT" panose="02010502060101010101" pitchFamily="2" charset="-79"/>
+              </a:rPr>
+              <a:t> שמכיל פיזור טוב של סיסמאות נפוצות בדרגות חוזק ושנות, ולשקול אסטרטגיית סדר (שמקדמת ניסיונות בעלי הסתברות גבוהה יותר מוקדם). בניסוי שלנו, השתמשנו ב</a:t>
+            </a:r>
+            <a:r>
+              <a:rPr lang="en-US" dirty="0">
+                <a:latin typeface="Levenim MT" panose="02010502060101010101" pitchFamily="2" charset="-79"/>
+                <a:cs typeface="Levenim MT" panose="02010502060101010101" pitchFamily="2" charset="-79"/>
+              </a:rPr>
+              <a:t>RockYou</a:t>
+            </a:r>
+            <a:r>
+              <a:rPr lang="he-IL" dirty="0">
+                <a:latin typeface="Levenim MT" panose="02010502060101010101" pitchFamily="2" charset="-79"/>
+                <a:cs typeface="Levenim MT" panose="02010502060101010101" pitchFamily="2" charset="-79"/>
+              </a:rPr>
+              <a:t>, קובץ סיסמאות נפוץ, אך רוב הסיסמאות בדרגת </a:t>
+            </a:r>
+            <a:r>
+              <a:rPr lang="en-US" dirty="0">
+                <a:latin typeface="Levenim MT" panose="02010502060101010101" pitchFamily="2" charset="-79"/>
+                <a:cs typeface="Levenim MT" panose="02010502060101010101" pitchFamily="2" charset="-79"/>
+              </a:rPr>
+              <a:t>medium / strong</a:t>
+            </a:r>
+            <a:r>
+              <a:rPr lang="he-IL" dirty="0">
+                <a:latin typeface="Levenim MT" panose="02010502060101010101" pitchFamily="2" charset="-79"/>
+                <a:cs typeface="Levenim MT" panose="02010502060101010101" pitchFamily="2" charset="-79"/>
+              </a:rPr>
+              <a:t> אינן נמצאות בטווח הניסוי שלנו ( עד 50,000 ניסיונות או שעתיים). אי לכך, לא הצלחנו לפרוץ למשתמשים מדרגות אלו. </a:t>
+            </a:r>
+          </a:p>
+          <a:p>
+            <a:pPr marL="342900" indent="-342900" algn="r" rtl="1">
+              <a:lnSpc>
+                <a:spcPct val="150000"/>
+              </a:lnSpc>
+              <a:buFont typeface="Courier New" panose="02070309020205020404" pitchFamily="49" charset="0"/>
+              <a:buChar char="o"/>
+            </a:pPr>
+            <a:r>
+              <a:rPr lang="he-IL" dirty="0">
+                <a:latin typeface="Levenim MT" panose="02010502060101010101" pitchFamily="2" charset="-79"/>
+                <a:cs typeface="Levenim MT" panose="02010502060101010101" pitchFamily="2" charset="-79"/>
+              </a:rPr>
+              <a:t>עם זאת, קבצי סיסמאות נפוצים לרוב מסודרים ע"פ סדר מ"הקל לקשה" או "הכי נפוץ להכי פחות נפוץ", ולכן ניתן להסיק כי ככל שתקן הסיסמאות בשרת (לדוגמה: אם מחייבים משתמשים להכניס סיסמאות חזקות בלבד בעת הרשמה),כך המתקפות עלולות להמשך זמן רב יותר, וחשוב שמערכת ההגנות תהיה מספיק וורסטילית על מנת לעמוד בדרישות עומס המערכת מצד אחד, ומצד שני לא למנוע או להאט בחוויית משתמש. </a:t>
+            </a:r>
+            <a:endParaRPr lang="he-IL" dirty="0"/>
+          </a:p>
+        </p:txBody>
+      </p:sp>
+      <p:sp>
+        <p:nvSpPr>
+          <p:cNvPr id="4" name="Slide Number Placeholder 3">
+            <a:extLst>
+              <a:ext uri="{FF2B5EF4-FFF2-40B4-BE49-F238E27FC236}">
+                <a16:creationId xmlns:a16="http://schemas.microsoft.com/office/drawing/2014/main" id="{94999160-1EBA-B7F7-1CB7-5C2B08725440}"/>
+              </a:ext>
+            </a:extLst>
+          </p:cNvPr>
+          <p:cNvSpPr>
+            <a:spLocks noGrp="1"/>
+          </p:cNvSpPr>
+          <p:nvPr>
+            <p:ph type="sldNum" sz="quarter" idx="4"/>
+          </p:nvPr>
+        </p:nvSpPr>
+        <p:spPr>
+          <a:xfrm>
+            <a:off x="11353800" y="5879804"/>
+            <a:ext cx="661416" cy="895899"/>
+          </a:xfrm>
+        </p:spPr>
+        <p:txBody>
+          <a:bodyPr/>
+          <a:lstStyle/>
+          <a:p>
+            <a:pPr rtl="1"/>
+            <a:fld id="{58FB4751-880F-D840-AAA9-3A15815CC996}" type="slidenum">
+              <a:rPr lang="en-US" smtClean="0">
+                <a:latin typeface="Levenim MT" panose="02010502060101010101" pitchFamily="2" charset="-79"/>
+                <a:cs typeface="Levenim MT" panose="02010502060101010101" pitchFamily="2" charset="-79"/>
+              </a:rPr>
+              <a:pPr rtl="1"/>
+              <a:t>12</a:t>
+            </a:fld>
+            <a:endParaRPr lang="en-US" dirty="0">
+              <a:latin typeface="Levenim MT" panose="02010502060101010101" pitchFamily="2" charset="-79"/>
+              <a:cs typeface="Levenim MT" panose="02010502060101010101" pitchFamily="2" charset="-79"/>
+            </a:endParaRPr>
+          </a:p>
+        </p:txBody>
+      </p:sp>
+    </p:spTree>
+    <p:extLst>
+      <p:ext uri="{BB962C8B-B14F-4D97-AF65-F5344CB8AC3E}">
+        <p14:creationId xmlns:p14="http://schemas.microsoft.com/office/powerpoint/2010/main" val="1713145048"/>
+      </p:ext>
+    </p:extLst>
+  </p:cSld>
+  <p:clrMapOvr>
+    <a:masterClrMapping/>
+  </p:clrMapOvr>
+</p:sld>
+</file>
+
+<file path=ppt/slides/slide13.xml><?xml version="1.0" encoding="utf-8"?>
+<p:sld xmlns:a="http://schemas.openxmlformats.org/drawingml/2006/main" xmlns:r="http://schemas.openxmlformats.org/officeDocument/2006/relationships" xmlns:p="http://schemas.openxmlformats.org/presentationml/2006/main">
+  <p:cSld>
     <p:bg>
       <p:bgPr>
         <a:solidFill>
@@ -28479,7 +28820,21 @@
                 <a:latin typeface="Levenim MT" panose="02010502060101010101" pitchFamily="2" charset="-79"/>
                 <a:cs typeface="Levenim MT" panose="02010502060101010101" pitchFamily="2" charset="-79"/>
               </a:rPr>
-              <a:t>תומר טולדו - 209706795</a:t>
+              <a:t>תומר טולדו </a:t>
+            </a:r>
+            <a:r>
+              <a:rPr lang="en-US" dirty="0">
+                <a:latin typeface="Levenim MT" panose="02010502060101010101" pitchFamily="2" charset="-79"/>
+                <a:cs typeface="Levenim MT" panose="02010502060101010101" pitchFamily="2" charset="-79"/>
+              </a:rPr>
+              <a:t>	</a:t>
+            </a:r>
+            <a:r>
+              <a:rPr lang="he-IL" dirty="0">
+                <a:latin typeface="Levenim MT" panose="02010502060101010101" pitchFamily="2" charset="-79"/>
+                <a:cs typeface="Levenim MT" panose="02010502060101010101" pitchFamily="2" charset="-79"/>
+              </a:rPr>
+              <a:t>209706795</a:t>
             </a:r>
           </a:p>
           <a:p>
@@ -28489,7 +28844,21 @@
                 <a:latin typeface="Levenim MT" panose="02010502060101010101" pitchFamily="2" charset="-79"/>
                 <a:cs typeface="Levenim MT" panose="02010502060101010101" pitchFamily="2" charset="-79"/>
               </a:rPr>
-              <a:t>אביאל כהן - 205735806</a:t>
+              <a:t>אביאל כהן </a:t>
+            </a:r>
+            <a:r>
+              <a:rPr lang="en-US" dirty="0">
+                <a:latin typeface="Levenim MT" panose="02010502060101010101" pitchFamily="2" charset="-79"/>
+                <a:cs typeface="Levenim MT" panose="02010502060101010101" pitchFamily="2" charset="-79"/>
+              </a:rPr>
+              <a:t>	</a:t>
+            </a:r>
+            <a:r>
+              <a:rPr lang="he-IL" dirty="0">
+                <a:latin typeface="Levenim MT" panose="02010502060101010101" pitchFamily="2" charset="-79"/>
+                <a:cs typeface="Levenim MT" panose="02010502060101010101" pitchFamily="2" charset="-79"/>
+              </a:rPr>
+              <a:t>205735806</a:t>
             </a:r>
           </a:p>
         </p:txBody>
@@ -30066,32 +30435,45 @@
               <a:t>שרת אימות וירטואלי עם תצורה מתחלפת לכל ניסוי (בעזרת נקודת הקצה </a:t>
             </a:r>
             <a:r>
-              <a:rPr lang="en-US" dirty="0">
+              <a:rPr lang="en-US" b="1" dirty="0">
                 <a:latin typeface="Levenim MT" panose="02010502060101010101" pitchFamily="2" charset="-79"/>
                 <a:cs typeface="Levenim MT" panose="02010502060101010101" pitchFamily="2" charset="-79"/>
               </a:rPr>
               <a:t>PUT /</a:t>
             </a:r>
             <a:r>
-              <a:rPr lang="en-US" dirty="0" err="1">
+              <a:rPr lang="en-US" b="1" dirty="0" err="1">
                 <a:latin typeface="Levenim MT" panose="02010502060101010101" pitchFamily="2" charset="-79"/>
                 <a:cs typeface="Levenim MT" panose="02010502060101010101" pitchFamily="2" charset="-79"/>
               </a:rPr>
               <a:t>api</a:t>
             </a:r>
             <a:r>
-              <a:rPr lang="en-US" dirty="0">
+              <a:rPr lang="en-US" b="1" dirty="0">
                 <a:latin typeface="Levenim MT" panose="02010502060101010101" pitchFamily="2" charset="-79"/>
                 <a:cs typeface="Levenim MT" panose="02010502060101010101" pitchFamily="2" charset="-79"/>
               </a:rPr>
               <a:t>/config</a:t>
             </a:r>
             <a:r>
+              <a:rPr lang="he-IL" b="1" dirty="0">
+                <a:latin typeface="Levenim MT" panose="02010502060101010101" pitchFamily="2" charset="-79"/>
+                <a:cs typeface="Levenim MT" panose="02010502060101010101" pitchFamily="2" charset="-79"/>
+              </a:rPr>
+              <a:t> </a:t>
+            </a:r>
+            <a:br>
+              <a:rPr lang="en-US" dirty="0">
+                <a:latin typeface="Levenim MT" panose="02010502060101010101" pitchFamily="2" charset="-79"/>
+                <a:cs typeface="Levenim MT" panose="02010502060101010101" pitchFamily="2" charset="-79"/>
+              </a:rPr>
+            </a:br>
+            <a:r>
               <a:rPr lang="he-IL" dirty="0">
                 <a:latin typeface="Levenim MT" panose="02010502060101010101" pitchFamily="2" charset="-79"/>
                 <a:cs typeface="Levenim MT" panose="02010502060101010101" pitchFamily="2" charset="-79"/>
               </a:rPr>
-              <a:t> וקבצי </a:t>
+              <a:t>וקבצי </a:t>
             </a:r>
             <a:r>
               <a:rPr lang="en-US" dirty="0" err="1">
@@ -30176,7 +30558,7 @@
                 <a:latin typeface="Levenim MT" panose="02010502060101010101" pitchFamily="2" charset="-79"/>
                 <a:cs typeface="Levenim MT" panose="02010502060101010101" pitchFamily="2" charset="-79"/>
               </a:rPr>
-              <a:t> – סיסמאות הבנויות ממספרים או אותיות קטנות בלבד</a:t>
+              <a:t> – סיסמאות הבנויות ממספרים או אותיות קטנות בלבד.</a:t>
             </a:r>
           </a:p>
           <a:p>
@@ -30198,7 +30580,7 @@
                 <a:latin typeface="Levenim MT" panose="02010502060101010101" pitchFamily="2" charset="-79"/>
                 <a:cs typeface="Levenim MT" panose="02010502060101010101" pitchFamily="2" charset="-79"/>
               </a:rPr>
-              <a:t> – סיסמאות הבנויות עם אותיות גדולות ומספרים</a:t>
+              <a:t> – סיסמאות הבנויות ממספרים וגם אותיות קטנות וגדולות.</a:t>
             </a:r>
             <a:endParaRPr lang="en-US" dirty="0">
               <a:latin typeface="Levenim MT" panose="02010502060101010101" pitchFamily="2" charset="-79"/>
@@ -30368,8 +30750,8 @@
           </a:p>
         </p:txBody>
       </p:sp>
-      <mc:AlternateContent xmlns:mc="http://schemas.openxmlformats.org/markup-compatibility/2006" xmlns:a14="http://schemas.microsoft.com/office/drawing/2010/main">
-        <mc:Choice Requires="a14">
+      <mc:AlternateContent xmlns:mc="http://schemas.openxmlformats.org/markup-compatibility/2006">
+        <mc:Choice xmlns:a14="http://schemas.microsoft.com/office/drawing/2010/main" Requires="a14">
           <p:sp>
             <p:nvSpPr>
               <p:cNvPr id="25" name="Content Placeholder 24">
@@ -30438,21 +30820,7 @@
                     <a:latin typeface="Levenim MT" panose="02010502060101010101" pitchFamily="2" charset="-79"/>
                     <a:cs typeface="Levenim MT" panose="02010502060101010101" pitchFamily="2" charset="-79"/>
                   </a:rPr>
-                  <a:t>Lockout: </a:t>
-                </a:r>
-                <a:r>
-                  <a:rPr lang="en-US" dirty="0" err="1">
-                    <a:latin typeface="Levenim MT" panose="02010502060101010101" pitchFamily="2" charset="-79"/>
-                    <a:cs typeface="Levenim MT" panose="02010502060101010101" pitchFamily="2" charset="-79"/>
-                  </a:rPr>
-                  <a:t>LockoutThreshold</a:t>
-                </a:r>
-                <a:r>
-                  <a:rPr lang="en-US" dirty="0">
-                    <a:latin typeface="Levenim MT" panose="02010502060101010101" pitchFamily="2" charset="-79"/>
-                    <a:cs typeface="Levenim MT" panose="02010502060101010101" pitchFamily="2" charset="-79"/>
-                  </a:rPr>
-                  <a:t> = 10 (After 10 failed attempts </a:t>
+                  <a:t>Lockout: LockoutThreshold = 10 (After 10 failed attempts </a:t>
                 </a:r>
                 <a14:m>
                   <m:oMath xmlns:m="http://schemas.openxmlformats.org/officeDocument/2006/math">
@@ -30485,21 +30853,7 @@
                     <a:latin typeface="Levenim MT" panose="02010502060101010101" pitchFamily="2" charset="-79"/>
                     <a:cs typeface="Levenim MT" panose="02010502060101010101" pitchFamily="2" charset="-79"/>
                   </a:rPr>
-                  <a:t>CAPTCHA: </a:t>
-                </a:r>
-                <a:r>
-                  <a:rPr lang="en-US" dirty="0" err="1">
-                    <a:latin typeface="Levenim MT" panose="02010502060101010101" pitchFamily="2" charset="-79"/>
-                    <a:cs typeface="Levenim MT" panose="02010502060101010101" pitchFamily="2" charset="-79"/>
-                  </a:rPr>
-                  <a:t>CaptchaAfterFailedAttempts</a:t>
-                </a:r>
-                <a:r>
-                  <a:rPr lang="en-US" dirty="0">
-                    <a:latin typeface="Levenim MT" panose="02010502060101010101" pitchFamily="2" charset="-79"/>
-                    <a:cs typeface="Levenim MT" panose="02010502060101010101" pitchFamily="2" charset="-79"/>
-                  </a:rPr>
-                  <a:t> = 3</a:t>
+                  <a:t>CAPTCHA: CaptchaAfterFailedAttempts = 3</a:t>
                 </a:r>
               </a:p>
               <a:p>
@@ -30588,7 +30942,7 @@
                     <a:latin typeface="Levenim MT" panose="02010502060101010101" pitchFamily="2" charset="-79"/>
                     <a:cs typeface="Levenim MT" panose="02010502060101010101" pitchFamily="2" charset="-79"/>
                   </a:rPr>
-                  <a:t>Average / Median Latency </a:t>
+                  <a:t>Average / Median Latency (</a:t>
                 </a:r>
                 <a:r>
                   <a:rPr lang="en-US" dirty="0" err="1">
@@ -30597,10 +30951,13 @@
                   </a:rPr>
                   <a:t>ms</a:t>
                 </a:r>
-                <a:endParaRPr lang="en-US" dirty="0">
-                  <a:latin typeface="Levenim MT" panose="02010502060101010101" pitchFamily="2" charset="-79"/>
-                  <a:cs typeface="Levenim MT" panose="02010502060101010101" pitchFamily="2" charset="-79"/>
-                </a:endParaRPr>
+                <a:r>
+                  <a:rPr lang="en-US" dirty="0">
+                    <a:latin typeface="Levenim MT" panose="02010502060101010101" pitchFamily="2" charset="-79"/>
+                    <a:cs typeface="Levenim MT" panose="02010502060101010101" pitchFamily="2" charset="-79"/>
+                  </a:rPr>
+                  <a:t>)</a:t>
+                </a:r>
               </a:p>
               <a:p>
                 <a:pPr marL="457200" lvl="1" indent="-457200" algn="l">
@@ -30624,7 +30981,7 @@
             </p:txBody>
           </p:sp>
         </mc:Choice>
-        <mc:Fallback xmlns="">
+        <mc:Fallback>
           <p:sp>
             <p:nvSpPr>
               <p:cNvPr id="25" name="Content Placeholder 24">
@@ -30988,7 +31345,7 @@
             <p:ph sz="quarter" idx="13"/>
             <p:extLst>
               <p:ext uri="{D42A27DB-BD31-4B8C-83A1-F6EECF244321}">
-                <p14:modId xmlns:p14="http://schemas.microsoft.com/office/powerpoint/2010/main" val="2052163539"/>
+                <p14:modId xmlns:p14="http://schemas.microsoft.com/office/powerpoint/2010/main" val="2598113976"/>
               </p:ext>
             </p:extLst>
           </p:nvPr>
@@ -31116,7 +31473,7 @@
                     <a:bodyPr/>
                     <a:lstStyle/>
                     <a:p>
-                      <a:pPr algn="l" rtl="0"/>
+                      <a:pPr algn="ctr" rtl="0"/>
                       <a:r>
                         <a:rPr lang="en-US" sz="2000" b="0" dirty="0"/>
                         <a:t>36.2~</a:t>
@@ -31130,7 +31487,7 @@
                     <a:bodyPr/>
                     <a:lstStyle/>
                     <a:p>
-                      <a:pPr algn="l" rtl="0"/>
+                      <a:pPr algn="ctr" rtl="0"/>
                       <a:r>
                         <a:rPr lang="en-US" sz="2000" b="0" dirty="0"/>
                         <a:t>0.6s~</a:t>
@@ -31144,7 +31501,7 @@
                     <a:bodyPr/>
                     <a:lstStyle/>
                     <a:p>
-                      <a:pPr algn="l" rtl="0"/>
+                      <a:pPr algn="ctr" rtl="0"/>
                       <a:r>
                         <a:rPr lang="en-US" sz="2000" b="0" dirty="0"/>
                         <a:t>10.8ms~</a:t>
@@ -31179,7 +31536,7 @@
                     <a:bodyPr/>
                     <a:lstStyle/>
                     <a:p>
-                      <a:pPr algn="l" rtl="0"/>
+                      <a:pPr algn="ctr" rtl="0"/>
                       <a:r>
                         <a:rPr lang="en-US" sz="2000" b="0" dirty="0"/>
                         <a:t>0.68~</a:t>
@@ -31193,7 +31550,7 @@
                     <a:bodyPr/>
                     <a:lstStyle/>
                     <a:p>
-                      <a:pPr algn="l" rtl="0"/>
+                      <a:pPr algn="ctr" rtl="0"/>
                       <a:r>
                         <a:rPr lang="en-US" sz="2000" b="0" dirty="0"/>
                         <a:t>30.8s~</a:t>
@@ -31207,7 +31564,7 @@
                     <a:bodyPr/>
                     <a:lstStyle/>
                     <a:p>
-                      <a:pPr algn="l" rtl="0"/>
+                      <a:pPr algn="ctr" rtl="0"/>
                       <a:r>
                         <a:rPr lang="en-US" sz="2000" b="0" dirty="0"/>
                         <a:t>1445ms~</a:t>
@@ -31242,7 +31599,7 @@
                     <a:bodyPr/>
                     <a:lstStyle/>
                     <a:p>
-                      <a:pPr algn="l" rtl="0"/>
+                      <a:pPr algn="ctr" rtl="0"/>
                       <a:r>
                         <a:rPr lang="en-US" sz="2000" b="0" dirty="0"/>
                         <a:t>1.66~</a:t>
@@ -31256,7 +31613,7 @@
                     <a:bodyPr/>
                     <a:lstStyle/>
                     <a:p>
-                      <a:pPr algn="l" rtl="0"/>
+                      <a:pPr algn="ctr" rtl="0"/>
                       <a:r>
                         <a:rPr lang="en-US" sz="2000" b="0" dirty="0"/>
                         <a:t>12.5~</a:t>
@@ -31270,7 +31627,7 @@
                     <a:bodyPr/>
                     <a:lstStyle/>
                     <a:p>
-                      <a:pPr algn="l" rtl="0"/>
+                      <a:pPr algn="ctr" rtl="0"/>
                       <a:r>
                         <a:rPr lang="en-US" sz="2000" b="0" dirty="0"/>
                         <a:t>554ms~</a:t>
@@ -31599,7 +31956,7 @@
             <p:ph sz="quarter" idx="13"/>
             <p:extLst>
               <p:ext uri="{D42A27DB-BD31-4B8C-83A1-F6EECF244321}">
-                <p14:modId xmlns:p14="http://schemas.microsoft.com/office/powerpoint/2010/main" val="1197483526"/>
+                <p14:modId xmlns:p14="http://schemas.microsoft.com/office/powerpoint/2010/main" val="870545315"/>
               </p:ext>
             </p:extLst>
           </p:nvPr>
@@ -31622,14 +31979,14 @@
                     </a:ext>
                   </a:extLst>
                 </a:gridCol>
-                <a:gridCol w="2774587">
+                <a:gridCol w="2814221">
                   <a:extLst>
                     <a:ext uri="{9D8B030D-6E8A-4147-A177-3AD203B41FA5}">
                       <a16:colId xmlns:a16="http://schemas.microsoft.com/office/drawing/2014/main" val="2660631934"/>
                     </a:ext>
                   </a:extLst>
                 </a:gridCol>
-                <a:gridCol w="1302279">
+                <a:gridCol w="1262645">
                   <a:extLst>
                     <a:ext uri="{9D8B030D-6E8A-4147-A177-3AD203B41FA5}">
                       <a16:colId xmlns:a16="http://schemas.microsoft.com/office/drawing/2014/main" val="3909717689"/>
@@ -31727,7 +32084,7 @@
                     <a:bodyPr/>
                     <a:lstStyle/>
                     <a:p>
-                      <a:pPr algn="l" rtl="0"/>
+                      <a:pPr algn="ctr" rtl="0"/>
                       <a:r>
                         <a:rPr lang="en-US" sz="2000" b="0" dirty="0"/>
                         <a:t>0.10~</a:t>
@@ -31741,7 +32098,7 @@
                     <a:bodyPr/>
                     <a:lstStyle/>
                     <a:p>
-                      <a:pPr algn="l" rtl="0"/>
+                      <a:pPr algn="ctr" rtl="0"/>
                       <a:r>
                         <a:rPr lang="en-US" sz="2000" b="0" dirty="0"/>
                         <a:t>242.5s~</a:t>
@@ -31755,7 +32112,7 @@
                     <a:bodyPr/>
                     <a:lstStyle/>
                     <a:p>
-                      <a:pPr algn="l" rtl="0"/>
+                      <a:pPr algn="ctr" rtl="0"/>
                       <a:endParaRPr lang="en-US" sz="2000" b="0" dirty="0"/>
                     </a:p>
                   </a:txBody>
@@ -31787,7 +32144,7 @@
                     <a:bodyPr/>
                     <a:lstStyle/>
                     <a:p>
-                      <a:pPr algn="l" rtl="0"/>
+                      <a:pPr algn="ctr" rtl="0"/>
                       <a:r>
                         <a:rPr lang="en-US" sz="2000" b="0" dirty="0"/>
                         <a:t>96 Total Attempts</a:t>
@@ -31801,8 +32158,11 @@
                     <a:bodyPr/>
                     <a:lstStyle/>
                     <a:p>
-                      <a:pPr algn="l" rtl="0"/>
-                      <a:endParaRPr lang="en-US" sz="2000" b="0" dirty="0"/>
+                      <a:pPr algn="ctr" rtl="0"/>
+                      <a:r>
+                        <a:rPr lang="en-US" sz="2000" b="0" dirty="0"/>
+                        <a:t>X</a:t>
+                      </a:r>
                     </a:p>
                   </a:txBody>
                   <a:tcPr anchor="ctr"/>
@@ -31812,7 +32172,7 @@
                     <a:bodyPr/>
                     <a:lstStyle/>
                     <a:p>
-                      <a:pPr algn="l" rtl="0"/>
+                      <a:pPr algn="ctr" rtl="0"/>
                       <a:r>
                         <a:rPr lang="en-US" sz="2000" b="0" dirty="0"/>
                         <a:t>20% ~</a:t>
@@ -31847,7 +32207,7 @@
                     <a:bodyPr/>
                     <a:lstStyle/>
                     <a:p>
-                      <a:pPr algn="l" rtl="0"/>
+                      <a:pPr algn="ctr" rtl="0"/>
                       <a:r>
                         <a:rPr lang="en-US" sz="2000" b="0" dirty="0"/>
                         <a:t>16.2~</a:t>
@@ -31861,7 +32221,7 @@
                     <a:bodyPr/>
                     <a:lstStyle/>
                     <a:p>
-                      <a:pPr algn="l" rtl="0"/>
+                      <a:pPr algn="ctr" rtl="0"/>
                       <a:r>
                         <a:rPr lang="en-US" sz="2000" b="0" dirty="0"/>
                         <a:t>1.2s~</a:t>
@@ -31875,7 +32235,7 @@
                     <a:bodyPr/>
                     <a:lstStyle/>
                     <a:p>
-                      <a:pPr algn="l" rtl="0"/>
+                      <a:pPr algn="ctr" rtl="0"/>
                       <a:endParaRPr lang="en-US" sz="2000" b="0" dirty="0"/>
                     </a:p>
                   </a:txBody>
@@ -32876,26 +33236,6 @@
 </file>
 
 <file path=customXml/item1.xml><?xml version="1.0" encoding="utf-8"?>
-<p:properties xmlns:p="http://schemas.microsoft.com/office/2006/metadata/properties" xmlns:xsi="http://www.w3.org/2001/XMLSchema-instance" xmlns:pc="http://schemas.microsoft.com/office/infopath/2007/PartnerControls">
-  <documentManagement>
-    <_ip_UnifiedCompliancePolicyUIAction xmlns="http://schemas.microsoft.com/sharepoint/v3" xsi:nil="true"/>
-    <Image xmlns="71af3243-3dd4-4a8d-8c0d-dd76da1f02a5">
-      <Url xsi:nil="true"/>
-      <Description xsi:nil="true"/>
-    </Image>
-    <Status xmlns="71af3243-3dd4-4a8d-8c0d-dd76da1f02a5">Not started</Status>
-    <Background xmlns="71af3243-3dd4-4a8d-8c0d-dd76da1f02a5">false</Background>
-    <_ip_UnifiedCompliancePolicyProperties xmlns="http://schemas.microsoft.com/sharepoint/v3" xsi:nil="true"/>
-    <ImageTagsTaxHTField xmlns="71af3243-3dd4-4a8d-8c0d-dd76da1f02a5">
-      <Terms xmlns="http://schemas.microsoft.com/office/infopath/2007/PartnerControls"/>
-    </ImageTagsTaxHTField>
-    <TaxCatchAll xmlns="230e9df3-be65-4c73-a93b-d1236ebd677e" xsi:nil="true"/>
-    <MediaServiceKeyPoints xmlns="71af3243-3dd4-4a8d-8c0d-dd76da1f02a5" xsi:nil="true"/>
-  </documentManagement>
-</p:properties>
-</file>
-
-<file path=customXml/item2.xml><?xml version="1.0" encoding="utf-8"?>
 <ct:contentTypeSchema xmlns:ct="http://schemas.microsoft.com/office/2006/metadata/contentType" xmlns:ma="http://schemas.microsoft.com/office/2006/metadata/properties/metaAttributes" ct:_="" ma:_="" ma:contentTypeName="Document" ma:contentTypeID="0x01010079F111ED35F8CC479449609E8A0923A6" ma:contentTypeVersion="28" ma:contentTypeDescription="Create a new document." ma:contentTypeScope="" ma:versionID="60f5a4f2d2b0abadcf532d48ebf9cb71">
   <xsd:schema xmlns:xsd="http://www.w3.org/2001/XMLSchema" xmlns:xs="http://www.w3.org/2001/XMLSchema" xmlns:p="http://schemas.microsoft.com/office/2006/metadata/properties" xmlns:ns1="http://schemas.microsoft.com/sharepoint/v3" xmlns:ns2="71af3243-3dd4-4a8d-8c0d-dd76da1f02a5" xmlns:ns3="16c05727-aa75-4e4a-9b5f-8a80a1165891" xmlns:ns4="230e9df3-be65-4c73-a93b-d1236ebd677e" targetNamespace="http://schemas.microsoft.com/office/2006/metadata/properties" ma:root="true" ma:fieldsID="7dd78129e6a1811f84807ad11c651531" ns1:_="" ns2:_="" ns3:_="" ns4:_="">
     <xsd:import namespace="http://schemas.microsoft.com/sharepoint/v3"/>
@@ -33207,7 +33547,7 @@
 </ct:contentTypeSchema>
 </file>
 
-<file path=customXml/item3.xml><?xml version="1.0" encoding="utf-8"?>
+<file path=customXml/item2.xml><?xml version="1.0" encoding="utf-8"?>
 <?mso-contentType ?>
 <FormTemplates xmlns="http://schemas.microsoft.com/sharepoint/v3/contenttype/forms">
   <Display>DocumentLibraryForm</Display>
@@ -33216,19 +33556,27 @@
 </FormTemplates>
 </file>
 
-<file path=customXml/itemProps1.xml><?xml version="1.0" encoding="utf-8"?>
-<ds:datastoreItem xmlns:ds="http://schemas.openxmlformats.org/officeDocument/2006/customXml" ds:itemID="{85DF9CEC-52C2-4D14-B2F5-11176002A8B6}">
-  <ds:schemaRefs>
-    <ds:schemaRef ds:uri="http://schemas.microsoft.com/office/2006/metadata/properties"/>
-    <ds:schemaRef ds:uri="http://schemas.microsoft.com/office/infopath/2007/PartnerControls"/>
-    <ds:schemaRef ds:uri="http://schemas.microsoft.com/sharepoint/v3"/>
-    <ds:schemaRef ds:uri="71af3243-3dd4-4a8d-8c0d-dd76da1f02a5"/>
-    <ds:schemaRef ds:uri="230e9df3-be65-4c73-a93b-d1236ebd677e"/>
-  </ds:schemaRefs>
-</ds:datastoreItem>
+<file path=customXml/item3.xml><?xml version="1.0" encoding="utf-8"?>
+<p:properties xmlns:p="http://schemas.microsoft.com/office/2006/metadata/properties" xmlns:xsi="http://www.w3.org/2001/XMLSchema-instance" xmlns:pc="http://schemas.microsoft.com/office/infopath/2007/PartnerControls">
+  <documentManagement>
+    <_ip_UnifiedCompliancePolicyUIAction xmlns="http://schemas.microsoft.com/sharepoint/v3" xsi:nil="true"/>
+    <Image xmlns="71af3243-3dd4-4a8d-8c0d-dd76da1f02a5">
+      <Url xsi:nil="true"/>
+      <Description xsi:nil="true"/>
+    </Image>
+    <Status xmlns="71af3243-3dd4-4a8d-8c0d-dd76da1f02a5">Not started</Status>
+    <Background xmlns="71af3243-3dd4-4a8d-8c0d-dd76da1f02a5">false</Background>
+    <_ip_UnifiedCompliancePolicyProperties xmlns="http://schemas.microsoft.com/sharepoint/v3" xsi:nil="true"/>
+    <ImageTagsTaxHTField xmlns="71af3243-3dd4-4a8d-8c0d-dd76da1f02a5">
+      <Terms xmlns="http://schemas.microsoft.com/office/infopath/2007/PartnerControls"/>
+    </ImageTagsTaxHTField>
+    <TaxCatchAll xmlns="230e9df3-be65-4c73-a93b-d1236ebd677e" xsi:nil="true"/>
+    <MediaServiceKeyPoints xmlns="71af3243-3dd4-4a8d-8c0d-dd76da1f02a5" xsi:nil="true"/>
+  </documentManagement>
+</p:properties>
 </file>
 
-<file path=customXml/itemProps2.xml><?xml version="1.0" encoding="utf-8"?>
+<file path=customXml/itemProps1.xml><?xml version="1.0" encoding="utf-8"?>
 <ds:datastoreItem xmlns:ds="http://schemas.openxmlformats.org/officeDocument/2006/customXml" ds:itemID="{4D8B1D1D-0064-435C-8533-29A36067B8ED}">
   <ds:schemaRefs>
     <ds:schemaRef ds:uri="http://schemas.microsoft.com/office/2006/metadata/contentType"/>
@@ -33249,7 +33597,7 @@
 </ds:datastoreItem>
 </file>
 
-<file path=customXml/itemProps3.xml><?xml version="1.0" encoding="utf-8"?>
+<file path=customXml/itemProps2.xml><?xml version="1.0" encoding="utf-8"?>
 <ds:datastoreItem xmlns:ds="http://schemas.openxmlformats.org/officeDocument/2006/customXml" ds:itemID="{1249AD37-9510-4A2D-B790-12C439A83F93}">
   <ds:schemaRefs>
     <ds:schemaRef ds:uri="http://schemas.microsoft.com/sharepoint/v3/contenttype/forms"/>
@@ -33257,6 +33605,18 @@
 </ds:datastoreItem>
 </file>
 
+<file path=customXml/itemProps3.xml><?xml version="1.0" encoding="utf-8"?>
+<ds:datastoreItem xmlns:ds="http://schemas.openxmlformats.org/officeDocument/2006/customXml" ds:itemID="{85DF9CEC-52C2-4D14-B2F5-11176002A8B6}">
+  <ds:schemaRefs>
+    <ds:schemaRef ds:uri="http://schemas.microsoft.com/office/2006/metadata/properties"/>
+    <ds:schemaRef ds:uri="http://schemas.microsoft.com/office/infopath/2007/PartnerControls"/>
+    <ds:schemaRef ds:uri="http://schemas.microsoft.com/sharepoint/v3"/>
+    <ds:schemaRef ds:uri="71af3243-3dd4-4a8d-8c0d-dd76da1f02a5"/>
+    <ds:schemaRef ds:uri="230e9df3-be65-4c73-a93b-d1236ebd677e"/>
+  </ds:schemaRefs>
+</ds:datastoreItem>
+</file>
+
 <file path=docMetadata/LabelInfo.xml><?xml version="1.0" encoding="utf-8"?>
 <clbl:labelList xmlns:clbl="http://schemas.microsoft.com/office/2020/mipLabelMetadata"/>
 </file>